--- a/docs/week-6/cen429-week-6-sunum.tr.pptx
+++ b/docs/week-6/cen429-week-6-sunum.tr.pptx
@@ -22148,40 +22148,30 @@
           </a:p>
         </p:txBody>
       </p:sp>
-      <p:sp>
-        <p:nvSpPr>
-          <p:cNvPr id="7" name="TextBox 6"/>
-          <p:cNvSpPr txBox="1"/>
-          <p:nvPr/>
-        </p:nvSpPr>
-        <p:spPr>
-          <a:xfrm>
-            <a:off x="640080" y="1325880"/>
-            <a:ext cx="10911535" cy="4319778"/>
-          </a:xfrm>
-          <a:prstGeom prst="rect">
-            <a:avLst/>
-          </a:prstGeom>
-          <a:noFill/>
-        </p:spPr>
-        <p:txBody>
-          <a:bodyPr wrap="square" lIns="45720" rIns="45720">
-            <a:spAutoFit/>
-          </a:bodyPr>
-          <a:lstStyle/>
-          <a:p>
-            <a:pPr algn="l"/>
-            <a:r>
-              <a:rPr sz="1500" b="0">
-                <a:solidFill>
-                  <a:srgbClr val="1F2D3A"/>
-                </a:solidFill>
-              </a:rPr>
-              <a:t>&lt;svg viewBox="0 0 960 250" style="width:96%;height:auto;display:block;margin:4px auto" font-family="sans-serif"&gt; &lt;rect x="20" y="60" width="270" height="120" rx="12" fill="#e8f6f7" stroke="#0a9396" stroke-width="2"/&gt; &lt;text x="155" y="95" text-anchor="middle" font-size="22" fill="#005f66" font-weight="bold"&gt;ALGILA&lt;/text&gt; &lt;text x="155" y="126" text-anchor="middle" font-size="15" fill="#333"&gt;self-hashing · anti-debug&lt;/text&gt; &lt;text x="155" y="150" text-anchor="middle" font-size="15" fill="#333"&gt;emülatör · hook · kök&lt;/text&gt; &lt;rect x="345" y="60" width="270" height="120" rx="12" fill="#eaf4ea" stroke="#2e7d32" stroke-width="2"/&gt; &lt;text x="480" y="95" text-anchor="middle" font-size="22" fill="#1b5e20" font-weight="bold"&gt;SAVUN&lt;/text&gt; &lt;text x="480" y="126" text-anchor="middle" font-size="15" fill="#333"&gt;anahtar/veri koruma&lt;/text&gt; &lt;text x="480" y="150" text-anchor="middle" font-size="15" fill="#333"&gt;işlevi kısıtla · bütünlük&lt;/text&gt; &lt;rect x="670" y="60" width="270" height="120" rx="12" fill="#fdf1e7" stroke="#b5651d" stroke-width="2"/&gt; &lt;text x="805" y="95" text-anchor="middle" font-size="22" fill="#8a4b12" font-weight="bold"&gt;CAYDIR&lt;/text&gt; &lt;text x="805" y="126" text-anchor="middle" font-size="15" fill="#333"&gt;gecikmeli/sessiz tepki&lt;/text&gt; &lt;text x="805" y="150" text-anchor="middle" font-size="15" fill="#333"&gt;kapan · boz · bildir&lt;/text&gt; &lt;line x1="290" y1="120" x2="345" y2="120" stroke="#555" stroke-width="3" marker-end="url(#a6)"/&gt; &lt;line x1="615" y1="120" x2="670" y2="120" stroke="#555" stroke-width="3" marker-end="url(#a6)"/&gt; &lt;text x="480" y="222" text-anchor="middle" font-size="15" fill="#555"&gt;Tek denetim değil, birbirini kontrol eden örtüşen ağ → tek yama yetmez.&lt;/text&gt; &lt;defs&gt;&lt;marker id="a6" markerWidth="9" markerHeight="9" refX="7" refY="3" orient="auto"&gt;&lt;path d="M0,0 L7,3 L0,6 Z" fill="#555"/&gt;&lt;/marker&gt;&lt;/defs&gt; &lt;/svg&gt;</a:t>
-            </a:r>
-          </a:p>
-        </p:txBody>
-      </p:sp>
+      <p:pic>
+        <p:nvPicPr>
+          <p:cNvPr id="7" name="Picture 6" descr="h06-01-rasp-dongusu.png"/>
+          <p:cNvPicPr>
+            <a:picLocks noChangeAspect="1"/>
+          </p:cNvPicPr>
+          <p:nvPr/>
+        </p:nvPicPr>
+        <p:blipFill>
+          <a:blip r:embed="rId3"/>
+          <a:stretch>
+            <a:fillRect/>
+          </a:stretch>
+        </p:blipFill>
+        <p:spPr>
+          <a:xfrm>
+            <a:off x="1833529" y="1325880"/>
+            <a:ext cx="8524636" cy="3790714"/>
+          </a:xfrm>
+          <a:prstGeom prst="rect">
+            <a:avLst/>
+          </a:prstGeom>
+        </p:spPr>
+      </p:pic>
     </p:spTree>
   </p:cSld>
   <p:clrMapOvr>
